--- a/Web Application Development/13.4. Micro-Frontends.pptx
+++ b/Web Application Development/13.4. Micro-Frontends.pptx
@@ -38,9 +38,9 @@
     <p:sldId id="712" r:id="rId29"/>
     <p:sldId id="713" r:id="rId30"/>
     <p:sldId id="691" r:id="rId31"/>
-    <p:sldId id="694" r:id="rId32"/>
-    <p:sldId id="696" r:id="rId33"/>
-    <p:sldId id="697" r:id="rId34"/>
+    <p:sldId id="714" r:id="rId32"/>
+    <p:sldId id="694" r:id="rId33"/>
+    <p:sldId id="696" r:id="rId34"/>
     <p:sldId id="693" r:id="rId35"/>
     <p:sldId id="692" r:id="rId36"/>
     <p:sldId id="516" r:id="rId37"/>
@@ -258,7 +258,7 @@
             <a:fld id="{2F0940CE-BE1D-4C40-AF8B-3898A4D1F5EC}" type="datetimeFigureOut">
               <a:rPr lang="en-US" smtClean="0"/>
               <a:pPr/>
-              <a:t>8/5/2025</a:t>
+              <a:t>7/14/2026</a:t>
             </a:fld>
             <a:endParaRPr lang="en-US"/>
           </a:p>
@@ -797,7 +797,7 @@
               <a:pPr>
                 <a:defRPr/>
               </a:pPr>
-              <a:t>8/5/2025</a:t>
+              <a:t>7/14/2026</a:t>
             </a:fld>
             <a:endParaRPr lang="en-US"/>
           </a:p>
@@ -989,7 +989,7 @@
               <a:pPr>
                 <a:defRPr/>
               </a:pPr>
-              <a:t>8/5/2025</a:t>
+              <a:t>7/14/2026</a:t>
             </a:fld>
             <a:endParaRPr lang="en-US"/>
           </a:p>
@@ -1191,7 +1191,7 @@
               <a:pPr>
                 <a:defRPr/>
               </a:pPr>
-              <a:t>8/5/2025</a:t>
+              <a:t>7/14/2026</a:t>
             </a:fld>
             <a:endParaRPr lang="en-US"/>
           </a:p>
@@ -1383,7 +1383,7 @@
               <a:pPr>
                 <a:defRPr/>
               </a:pPr>
-              <a:t>8/5/2025</a:t>
+              <a:t>7/14/2026</a:t>
             </a:fld>
             <a:endParaRPr lang="en-US"/>
           </a:p>
@@ -1651,7 +1651,7 @@
               <a:pPr>
                 <a:defRPr/>
               </a:pPr>
-              <a:t>8/5/2025</a:t>
+              <a:t>7/14/2026</a:t>
             </a:fld>
             <a:endParaRPr lang="en-US"/>
           </a:p>
@@ -1961,7 +1961,7 @@
               <a:pPr>
                 <a:defRPr/>
               </a:pPr>
-              <a:t>8/5/2025</a:t>
+              <a:t>7/14/2026</a:t>
             </a:fld>
             <a:endParaRPr lang="en-US"/>
           </a:p>
@@ -2405,7 +2405,7 @@
               <a:pPr>
                 <a:defRPr/>
               </a:pPr>
-              <a:t>8/5/2025</a:t>
+              <a:t>7/14/2026</a:t>
             </a:fld>
             <a:endParaRPr lang="en-US"/>
           </a:p>
@@ -2545,7 +2545,7 @@
               <a:pPr>
                 <a:defRPr/>
               </a:pPr>
-              <a:t>8/5/2025</a:t>
+              <a:t>7/14/2026</a:t>
             </a:fld>
             <a:endParaRPr lang="en-US"/>
           </a:p>
@@ -2662,7 +2662,7 @@
               <a:pPr>
                 <a:defRPr/>
               </a:pPr>
-              <a:t>8/5/2025</a:t>
+              <a:t>7/14/2026</a:t>
             </a:fld>
             <a:endParaRPr lang="en-US"/>
           </a:p>
@@ -2961,7 +2961,7 @@
               <a:pPr>
                 <a:defRPr/>
               </a:pPr>
-              <a:t>8/5/2025</a:t>
+              <a:t>7/14/2026</a:t>
             </a:fld>
             <a:endParaRPr lang="en-US"/>
           </a:p>
@@ -3239,7 +3239,7 @@
               <a:pPr>
                 <a:defRPr/>
               </a:pPr>
-              <a:t>8/5/2025</a:t>
+              <a:t>7/14/2026</a:t>
             </a:fld>
             <a:endParaRPr lang="en-US"/>
           </a:p>
@@ -3487,7 +3487,7 @@
               <a:pPr>
                 <a:defRPr/>
               </a:pPr>
-              <a:t>8/5/2025</a:t>
+              <a:t>7/14/2026</a:t>
             </a:fld>
             <a:endParaRPr lang="en-US"/>
           </a:p>
@@ -5834,11 +5834,7 @@
           <a:p>
             <a:r>
               <a:rPr lang="en-US" dirty="0" smtClean="0"/>
-              <a:t>App shell with </a:t>
-            </a:r>
-            <a:r>
-              <a:rPr lang="en-US" dirty="0" smtClean="0"/>
-              <a:t>Two-level Routing</a:t>
+              <a:t>App shell with Two-level Routing</a:t>
             </a:r>
             <a:endParaRPr lang="en-US" dirty="0"/>
           </a:p>
@@ -5866,45 +5862,13 @@
           <a:p>
             <a:r>
               <a:rPr lang="en-US" sz="1800" dirty="0" smtClean="0"/>
-              <a:t>The app shell looks at the first part of the URL </a:t>
-            </a:r>
+              <a:t>The app shell looks at the first part of the URL to determine which team is responsible (top-level routing).</a:t>
+            </a:r>
+          </a:p>
+          <a:p>
             <a:r>
               <a:rPr lang="en-US" sz="1800" dirty="0" smtClean="0"/>
-              <a:t>to determine </a:t>
-            </a:r>
-            <a:r>
-              <a:rPr lang="en-US" sz="1800" dirty="0" smtClean="0"/>
-              <a:t>which team is responsible (top-level routing</a:t>
-            </a:r>
-            <a:r>
-              <a:rPr lang="en-US" sz="1800" dirty="0" smtClean="0"/>
-              <a:t>).</a:t>
-            </a:r>
-          </a:p>
-          <a:p>
-            <a:r>
-              <a:rPr lang="en-US" sz="1800" dirty="0" smtClean="0"/>
-              <a:t>The </a:t>
-            </a:r>
-            <a:r>
-              <a:rPr lang="en-US" sz="1800" dirty="0" smtClean="0"/>
-              <a:t>router of the </a:t>
-            </a:r>
-            <a:r>
-              <a:rPr lang="en-US" sz="1800" dirty="0" smtClean="0"/>
-              <a:t>matched team </a:t>
-            </a:r>
-            <a:r>
-              <a:rPr lang="en-US" sz="1800" dirty="0" smtClean="0"/>
-              <a:t>processes the complete URL to find the correct page inside its </a:t>
-            </a:r>
-            <a:r>
-              <a:rPr lang="en-US" sz="1800" dirty="0" smtClean="0"/>
-              <a:t>single-page application </a:t>
-            </a:r>
-            <a:r>
-              <a:rPr lang="en-US" sz="1800" dirty="0" smtClean="0"/>
-              <a:t>(second-level routing).</a:t>
+              <a:t>The router of the matched team processes the complete URL to find the correct page inside its single-page application (second-level routing).</a:t>
             </a:r>
             <a:endParaRPr lang="en-US" sz="1800" dirty="0"/>
           </a:p>
@@ -6009,13 +5973,7 @@
               <a:rPr lang="en-US" sz="2400" dirty="0" smtClean="0">
                 <a:hlinkClick r:id="rId2"/>
               </a:rPr>
-              <a:t>https://single-spa.js.org</a:t>
-            </a:r>
-            <a:r>
-              <a:rPr lang="en-US" sz="2400" dirty="0" smtClean="0">
-                <a:hlinkClick r:id="rId2"/>
-              </a:rPr>
-              <a:t>/</a:t>
+              <a:t>https://single-spa.js.org/</a:t>
             </a:r>
             <a:endParaRPr lang="en-US" sz="2400" dirty="0" smtClean="0"/>
           </a:p>
@@ -6102,11 +6060,7 @@
           <a:p>
             <a:r>
               <a:rPr lang="en-US" dirty="0" smtClean="0"/>
-              <a:t>Universal </a:t>
-            </a:r>
-            <a:r>
-              <a:rPr lang="en-US" dirty="0" smtClean="0"/>
-              <a:t>Composition</a:t>
+              <a:t>Universal Composition</a:t>
             </a:r>
             <a:endParaRPr lang="en-US" dirty="0"/>
           </a:p>
@@ -6166,35 +6120,7 @@
           <a:p>
             <a:r>
               <a:rPr lang="en-US" sz="2200" dirty="0" smtClean="0"/>
-              <a:t>The terms universal rendering</a:t>
-            </a:r>
-            <a:r>
-              <a:rPr lang="en-US" sz="2200" dirty="0" smtClean="0"/>
-              <a:t>, </a:t>
-            </a:r>
-            <a:r>
-              <a:rPr lang="en-US" sz="2200" dirty="0" smtClean="0"/>
-              <a:t>Isomorphic JavaScript</a:t>
-            </a:r>
-            <a:r>
-              <a:rPr lang="en-US" sz="2200" dirty="0" smtClean="0"/>
-              <a:t>, and </a:t>
-            </a:r>
-            <a:r>
-              <a:rPr lang="en-US" sz="2200" dirty="0" smtClean="0"/>
-              <a:t>server-side </a:t>
-            </a:r>
-            <a:r>
-              <a:rPr lang="en-US" sz="2200" dirty="0" smtClean="0"/>
-              <a:t>rendering (SSR</a:t>
-            </a:r>
-            <a:r>
-              <a:rPr lang="en-US" sz="2200" dirty="0" smtClean="0"/>
-              <a:t>) essentially refer to the same </a:t>
-            </a:r>
-            <a:r>
-              <a:rPr lang="en-US" sz="2200" dirty="0" smtClean="0"/>
-              <a:t>concept.</a:t>
+              <a:t>The terms universal rendering, Isomorphic JavaScript, and server-side rendering (SSR) essentially refer to the same concept.</a:t>
             </a:r>
             <a:endParaRPr lang="en-US" sz="2200" dirty="0"/>
           </a:p>
@@ -6242,11 +6168,7 @@
           <a:p>
             <a:r>
               <a:rPr lang="en-US" dirty="0" smtClean="0"/>
-              <a:t>Universal </a:t>
-            </a:r>
-            <a:r>
-              <a:rPr lang="en-US" dirty="0" smtClean="0"/>
-              <a:t>Composition</a:t>
+              <a:t>Universal Composition</a:t>
             </a:r>
             <a:endParaRPr lang="en-US" dirty="0"/>
           </a:p>
@@ -6269,85 +6191,25 @@
           <a:p>
             <a:r>
               <a:rPr lang="en-US" sz="2400" dirty="0" smtClean="0"/>
-              <a:t>Universal composition is the combination of a server- and a </a:t>
-            </a:r>
+              <a:t>Universal composition is the combination of a server- and a client-side composition technique.</a:t>
+            </a:r>
+          </a:p>
+          <a:p>
             <a:r>
               <a:rPr lang="en-US" sz="2400" dirty="0" smtClean="0"/>
-              <a:t>client-side composition technique.</a:t>
+              <a:t>For the first request, a technique like SSI, ESI, or Podium assembles the markup of all micro frontends server-side. The complete HTML document gets sent to the browser (1).</a:t>
             </a:r>
           </a:p>
           <a:p>
             <a:r>
               <a:rPr lang="en-US" sz="2400" dirty="0" smtClean="0"/>
-              <a:t>For </a:t>
-            </a:r>
+              <a:t>In the browser, each micro frontend hydrates itself and becomes interactive (2).</a:t>
+            </a:r>
+          </a:p>
+          <a:p>
             <a:r>
               <a:rPr lang="en-US" sz="2400" dirty="0" smtClean="0"/>
-              <a:t>the first request, a technique like SSI, ESI, or </a:t>
-            </a:r>
-            <a:r>
-              <a:rPr lang="en-US" sz="2400" dirty="0" smtClean="0"/>
-              <a:t>Podium assembles </a:t>
-            </a:r>
-            <a:r>
-              <a:rPr lang="en-US" sz="2400" dirty="0" smtClean="0"/>
-              <a:t>the markup of all micro frontends server-side. The complete </a:t>
-            </a:r>
-            <a:r>
-              <a:rPr lang="en-US" sz="2400" dirty="0" smtClean="0"/>
-              <a:t>HTML document </a:t>
-            </a:r>
-            <a:r>
-              <a:rPr lang="en-US" sz="2400" dirty="0" smtClean="0"/>
-              <a:t>gets sent to the </a:t>
-            </a:r>
-            <a:r>
-              <a:rPr lang="en-US" sz="2400" dirty="0" smtClean="0"/>
-              <a:t>browser (1).</a:t>
-            </a:r>
-          </a:p>
-          <a:p>
-            <a:r>
-              <a:rPr lang="en-US" sz="2400" dirty="0" smtClean="0"/>
-              <a:t>In </a:t>
-            </a:r>
-            <a:r>
-              <a:rPr lang="en-US" sz="2400" dirty="0" smtClean="0"/>
-              <a:t>the browser, each micro frontend </a:t>
-            </a:r>
-            <a:r>
-              <a:rPr lang="en-US" sz="2400" dirty="0" smtClean="0"/>
-              <a:t>hydrates itself </a:t>
-            </a:r>
-            <a:r>
-              <a:rPr lang="en-US" sz="2400" dirty="0" smtClean="0"/>
-              <a:t>and becomes </a:t>
-            </a:r>
-            <a:r>
-              <a:rPr lang="en-US" sz="2400" dirty="0" smtClean="0"/>
-              <a:t>interactive (2).</a:t>
-            </a:r>
-          </a:p>
-          <a:p>
-            <a:r>
-              <a:rPr lang="en-US" sz="2400" dirty="0" smtClean="0"/>
-              <a:t>From </a:t>
-            </a:r>
-            <a:r>
-              <a:rPr lang="en-US" sz="2400" dirty="0" smtClean="0"/>
-              <a:t>there on, all user interactions can </a:t>
-            </a:r>
-            <a:r>
-              <a:rPr lang="en-US" sz="2400" dirty="0" smtClean="0"/>
-              <a:t>happen fully </a:t>
-            </a:r>
-            <a:r>
-              <a:rPr lang="en-US" sz="2400" dirty="0" smtClean="0"/>
-              <a:t>client-side. The micro frontends update the markup directly in the browser </a:t>
-            </a:r>
-            <a:r>
-              <a:rPr lang="en-US" sz="2400" dirty="0" smtClean="0"/>
-              <a:t>(3).</a:t>
+              <a:t>From there on, all user interactions can happen fully client-side. The micro frontends update the markup directly in the browser (3).</a:t>
             </a:r>
             <a:endParaRPr lang="en-US" sz="2400" dirty="0"/>
           </a:p>
@@ -6573,6 +6435,88 @@
           <a:chExt cx="0" cy="0"/>
         </a:xfrm>
       </p:grpSpPr>
+      <p:sp>
+        <p:nvSpPr>
+          <p:cNvPr id="2" name="Title 1"/>
+          <p:cNvSpPr>
+            <a:spLocks noGrp="1"/>
+          </p:cNvSpPr>
+          <p:nvPr>
+            <p:ph type="title"/>
+          </p:nvPr>
+        </p:nvSpPr>
+        <p:spPr/>
+        <p:txBody>
+          <a:bodyPr/>
+          <a:lstStyle/>
+          <a:p>
+            <a:r>
+              <a:rPr lang="en-US" dirty="0" smtClean="0"/>
+              <a:t>Micro Frontend Demo</a:t>
+            </a:r>
+            <a:endParaRPr lang="en-US" dirty="0"/>
+          </a:p>
+        </p:txBody>
+      </p:sp>
+      <p:sp>
+        <p:nvSpPr>
+          <p:cNvPr id="3" name="Content Placeholder 2"/>
+          <p:cNvSpPr>
+            <a:spLocks noGrp="1"/>
+          </p:cNvSpPr>
+          <p:nvPr>
+            <p:ph idx="1"/>
+          </p:nvPr>
+        </p:nvSpPr>
+        <p:spPr/>
+        <p:txBody>
+          <a:bodyPr/>
+          <a:lstStyle/>
+          <a:p>
+            <a:r>
+              <a:rPr lang="en-US" sz="2400" dirty="0" smtClean="0">
+                <a:hlinkClick r:id="rId2"/>
+              </a:rPr>
+              <a:t>https://</a:t>
+            </a:r>
+            <a:r>
+              <a:rPr lang="en-US" sz="2400" dirty="0" smtClean="0">
+                <a:hlinkClick r:id="rId2"/>
+              </a:rPr>
+              <a:t>github.com/rautio/micro-frontend-demo</a:t>
+            </a:r>
+            <a:endParaRPr lang="en-US" sz="2400" dirty="0" smtClean="0"/>
+          </a:p>
+          <a:p>
+            <a:endParaRPr lang="en-US" sz="2400" dirty="0"/>
+          </a:p>
+        </p:txBody>
+      </p:sp>
+    </p:spTree>
+  </p:cSld>
+  <p:clrMapOvr>
+    <a:masterClrMapping/>
+  </p:clrMapOvr>
+</p:sld>
+</file>
+
+<file path=ppt/slides/slide32.xml><?xml version="1.0" encoding="utf-8"?>
+<p:sld xmlns:a="http://schemas.openxmlformats.org/drawingml/2006/main" xmlns:r="http://schemas.openxmlformats.org/officeDocument/2006/relationships" xmlns:p="http://schemas.openxmlformats.org/presentationml/2006/main">
+  <p:cSld>
+    <p:spTree>
+      <p:nvGrpSpPr>
+        <p:cNvPr id="1" name=""/>
+        <p:cNvGrpSpPr/>
+        <p:nvPr/>
+      </p:nvGrpSpPr>
+      <p:grpSpPr>
+        <a:xfrm>
+          <a:off x="0" y="0"/>
+          <a:ext cx="0" cy="0"/>
+          <a:chOff x="0" y="0"/>
+          <a:chExt cx="0" cy="0"/>
+        </a:xfrm>
+      </p:grpSpPr>
       <p:pic>
         <p:nvPicPr>
           <p:cNvPr id="2" name="Picture 2" descr="https://lh3.ggpht.com/1IfZLL2QDSjZ0wS7sUhaMlsAOS8BBzdR3wZ1WawgRn7KZAM8nEVZYMOUM-lqQb0ikIzp=w300"/>
@@ -6607,7 +6551,7 @@
 </p:sld>
 </file>
 
-<file path=ppt/slides/slide32.xml><?xml version="1.0" encoding="utf-8"?>
+<file path=ppt/slides/slide33.xml><?xml version="1.0" encoding="utf-8"?>
 <p:sld xmlns:a="http://schemas.openxmlformats.org/drawingml/2006/main" xmlns:r="http://schemas.openxmlformats.org/officeDocument/2006/relationships" xmlns:p="http://schemas.openxmlformats.org/presentationml/2006/main">
   <p:cSld>
     <p:spTree>
@@ -6739,82 +6683,6 @@
           </a:ln>
         </p:spPr>
       </p:pic>
-    </p:spTree>
-  </p:cSld>
-  <p:clrMapOvr>
-    <a:masterClrMapping/>
-  </p:clrMapOvr>
-</p:sld>
-</file>
-
-<file path=ppt/slides/slide33.xml><?xml version="1.0" encoding="utf-8"?>
-<p:sld xmlns:a="http://schemas.openxmlformats.org/drawingml/2006/main" xmlns:r="http://schemas.openxmlformats.org/officeDocument/2006/relationships" xmlns:p="http://schemas.openxmlformats.org/presentationml/2006/main">
-  <p:cSld>
-    <p:spTree>
-      <p:nvGrpSpPr>
-        <p:cNvPr id="1" name=""/>
-        <p:cNvGrpSpPr/>
-        <p:nvPr/>
-      </p:nvGrpSpPr>
-      <p:grpSpPr>
-        <a:xfrm>
-          <a:off x="0" y="0"/>
-          <a:ext cx="0" cy="0"/>
-          <a:chOff x="0" y="0"/>
-          <a:chExt cx="0" cy="0"/>
-        </a:xfrm>
-      </p:grpSpPr>
-      <p:sp>
-        <p:nvSpPr>
-          <p:cNvPr id="2" name="Title 1"/>
-          <p:cNvSpPr>
-            <a:spLocks noGrp="1"/>
-          </p:cNvSpPr>
-          <p:nvPr>
-            <p:ph type="title"/>
-          </p:nvPr>
-        </p:nvSpPr>
-        <p:spPr/>
-        <p:txBody>
-          <a:bodyPr/>
-          <a:lstStyle/>
-          <a:p>
-            <a:r>
-              <a:rPr lang="en-US" dirty="0" err="1" smtClean="0"/>
-              <a:t>Jamstack</a:t>
-            </a:r>
-            <a:endParaRPr lang="en-US" dirty="0"/>
-          </a:p>
-        </p:txBody>
-      </p:sp>
-      <p:sp>
-        <p:nvSpPr>
-          <p:cNvPr id="3" name="Content Placeholder 2"/>
-          <p:cNvSpPr>
-            <a:spLocks noGrp="1"/>
-          </p:cNvSpPr>
-          <p:nvPr>
-            <p:ph idx="1"/>
-          </p:nvPr>
-        </p:nvSpPr>
-        <p:spPr/>
-        <p:txBody>
-          <a:bodyPr/>
-          <a:lstStyle/>
-          <a:p>
-            <a:r>
-              <a:rPr lang="en-US" sz="2400" dirty="0" smtClean="0">
-                <a:hlinkClick r:id="rId2"/>
-              </a:rPr>
-              <a:t>https://jamstack.org/</a:t>
-            </a:r>
-            <a:endParaRPr lang="en-US" sz="2400" dirty="0" smtClean="0"/>
-          </a:p>
-          <a:p>
-            <a:endParaRPr lang="en-US" sz="2400" dirty="0"/>
-          </a:p>
-        </p:txBody>
-      </p:sp>
     </p:spTree>
   </p:cSld>
   <p:clrMapOvr>

--- a/Web Application Development/13.4. Micro-Frontends.pptx
+++ b/Web Application Development/13.4. Micro-Frontends.pptx
@@ -5,7 +5,7 @@
     <p:sldMasterId id="2147483708" r:id="rId1"/>
   </p:sldMasterIdLst>
   <p:notesMasterIdLst>
-    <p:notesMasterId r:id="rId38"/>
+    <p:notesMasterId r:id="rId41"/>
   </p:notesMasterIdLst>
   <p:sldIdLst>
     <p:sldId id="670" r:id="rId2"/>
@@ -42,8 +42,11 @@
     <p:sldId id="694" r:id="rId33"/>
     <p:sldId id="696" r:id="rId34"/>
     <p:sldId id="693" r:id="rId35"/>
-    <p:sldId id="692" r:id="rId36"/>
-    <p:sldId id="516" r:id="rId37"/>
+    <p:sldId id="716" r:id="rId36"/>
+    <p:sldId id="717" r:id="rId37"/>
+    <p:sldId id="715" r:id="rId38"/>
+    <p:sldId id="692" r:id="rId39"/>
+    <p:sldId id="516" r:id="rId40"/>
   </p:sldIdLst>
   <p:sldSz cx="9144000" cy="6858000" type="screen4x3"/>
   <p:notesSz cx="6858000" cy="9144000"/>
@@ -258,7 +261,7 @@
             <a:fld id="{2F0940CE-BE1D-4C40-AF8B-3898A4D1F5EC}" type="datetimeFigureOut">
               <a:rPr lang="en-US" smtClean="0"/>
               <a:pPr/>
-              <a:t>7/14/2026</a:t>
+              <a:t>7/16/2026</a:t>
             </a:fld>
             <a:endParaRPr lang="en-US"/>
           </a:p>
@@ -797,7 +800,7 @@
               <a:pPr>
                 <a:defRPr/>
               </a:pPr>
-              <a:t>7/14/2026</a:t>
+              <a:t>7/16/2026</a:t>
             </a:fld>
             <a:endParaRPr lang="en-US"/>
           </a:p>
@@ -989,7 +992,7 @@
               <a:pPr>
                 <a:defRPr/>
               </a:pPr>
-              <a:t>7/14/2026</a:t>
+              <a:t>7/16/2026</a:t>
             </a:fld>
             <a:endParaRPr lang="en-US"/>
           </a:p>
@@ -1191,7 +1194,7 @@
               <a:pPr>
                 <a:defRPr/>
               </a:pPr>
-              <a:t>7/14/2026</a:t>
+              <a:t>7/16/2026</a:t>
             </a:fld>
             <a:endParaRPr lang="en-US"/>
           </a:p>
@@ -1383,7 +1386,7 @@
               <a:pPr>
                 <a:defRPr/>
               </a:pPr>
-              <a:t>7/14/2026</a:t>
+              <a:t>7/16/2026</a:t>
             </a:fld>
             <a:endParaRPr lang="en-US"/>
           </a:p>
@@ -1651,7 +1654,7 @@
               <a:pPr>
                 <a:defRPr/>
               </a:pPr>
-              <a:t>7/14/2026</a:t>
+              <a:t>7/16/2026</a:t>
             </a:fld>
             <a:endParaRPr lang="en-US"/>
           </a:p>
@@ -1961,7 +1964,7 @@
               <a:pPr>
                 <a:defRPr/>
               </a:pPr>
-              <a:t>7/14/2026</a:t>
+              <a:t>7/16/2026</a:t>
             </a:fld>
             <a:endParaRPr lang="en-US"/>
           </a:p>
@@ -2405,7 +2408,7 @@
               <a:pPr>
                 <a:defRPr/>
               </a:pPr>
-              <a:t>7/14/2026</a:t>
+              <a:t>7/16/2026</a:t>
             </a:fld>
             <a:endParaRPr lang="en-US"/>
           </a:p>
@@ -2545,7 +2548,7 @@
               <a:pPr>
                 <a:defRPr/>
               </a:pPr>
-              <a:t>7/14/2026</a:t>
+              <a:t>7/16/2026</a:t>
             </a:fld>
             <a:endParaRPr lang="en-US"/>
           </a:p>
@@ -2662,7 +2665,7 @@
               <a:pPr>
                 <a:defRPr/>
               </a:pPr>
-              <a:t>7/14/2026</a:t>
+              <a:t>7/16/2026</a:t>
             </a:fld>
             <a:endParaRPr lang="en-US"/>
           </a:p>
@@ -2961,7 +2964,7 @@
               <a:pPr>
                 <a:defRPr/>
               </a:pPr>
-              <a:t>7/14/2026</a:t>
+              <a:t>7/16/2026</a:t>
             </a:fld>
             <a:endParaRPr lang="en-US"/>
           </a:p>
@@ -3239,7 +3242,7 @@
               <a:pPr>
                 <a:defRPr/>
               </a:pPr>
-              <a:t>7/14/2026</a:t>
+              <a:t>7/16/2026</a:t>
             </a:fld>
             <a:endParaRPr lang="en-US"/>
           </a:p>
@@ -3487,7 +3490,7 @@
               <a:pPr>
                 <a:defRPr/>
               </a:pPr>
-              <a:t>7/14/2026</a:t>
+              <a:t>7/16/2026</a:t>
             </a:fld>
             <a:endParaRPr lang="en-US"/>
           </a:p>
@@ -6477,13 +6480,7 @@
               <a:rPr lang="en-US" sz="2400" dirty="0" smtClean="0">
                 <a:hlinkClick r:id="rId2"/>
               </a:rPr>
-              <a:t>https://</a:t>
-            </a:r>
-            <a:r>
-              <a:rPr lang="en-US" sz="2400" dirty="0" smtClean="0">
-                <a:hlinkClick r:id="rId2"/>
-              </a:rPr>
-              <a:t>github.com/rautio/micro-frontend-demo</a:t>
+              <a:t>https://github.com/rautio/micro-frontend-demo</a:t>
             </a:r>
             <a:endParaRPr lang="en-US" sz="2400" dirty="0" smtClean="0"/>
           </a:p>
@@ -6776,6 +6773,235 @@
           <a:p>
             <a:r>
               <a:rPr lang="en-US" dirty="0" smtClean="0"/>
+              <a:t>Demo 1</a:t>
+            </a:r>
+            <a:endParaRPr lang="en-US" dirty="0"/>
+          </a:p>
+        </p:txBody>
+      </p:sp>
+      <p:sp>
+        <p:nvSpPr>
+          <p:cNvPr id="3" name="Content Placeholder 2"/>
+          <p:cNvSpPr>
+            <a:spLocks noGrp="1"/>
+          </p:cNvSpPr>
+          <p:nvPr>
+            <p:ph idx="1"/>
+          </p:nvPr>
+        </p:nvSpPr>
+        <p:spPr/>
+        <p:txBody>
+          <a:bodyPr/>
+          <a:lstStyle/>
+          <a:p>
+            <a:r>
+              <a:rPr lang="en-US" sz="2800" dirty="0" smtClean="0">
+                <a:hlinkClick r:id="rId2"/>
+              </a:rPr>
+              <a:t>https://</a:t>
+            </a:r>
+            <a:r>
+              <a:rPr lang="en-US" sz="2800" dirty="0" smtClean="0">
+                <a:hlinkClick r:id="rId2"/>
+              </a:rPr>
+              <a:t>github.com/rautio/micro-frontend-demo</a:t>
+            </a:r>
+            <a:endParaRPr lang="en-US" sz="2800" dirty="0" smtClean="0"/>
+          </a:p>
+          <a:p>
+            <a:endParaRPr lang="en-US" sz="2800" dirty="0"/>
+          </a:p>
+        </p:txBody>
+      </p:sp>
+    </p:spTree>
+  </p:cSld>
+  <p:clrMapOvr>
+    <a:masterClrMapping/>
+  </p:clrMapOvr>
+</p:sld>
+</file>
+
+<file path=ppt/slides/slide36.xml><?xml version="1.0" encoding="utf-8"?>
+<p:sld xmlns:a="http://schemas.openxmlformats.org/drawingml/2006/main" xmlns:r="http://schemas.openxmlformats.org/officeDocument/2006/relationships" xmlns:p="http://schemas.openxmlformats.org/presentationml/2006/main">
+  <p:cSld>
+    <p:spTree>
+      <p:nvGrpSpPr>
+        <p:cNvPr id="1" name=""/>
+        <p:cNvGrpSpPr/>
+        <p:nvPr/>
+      </p:nvGrpSpPr>
+      <p:grpSpPr>
+        <a:xfrm>
+          <a:off x="0" y="0"/>
+          <a:ext cx="0" cy="0"/>
+          <a:chOff x="0" y="0"/>
+          <a:chExt cx="0" cy="0"/>
+        </a:xfrm>
+      </p:grpSpPr>
+      <p:sp>
+        <p:nvSpPr>
+          <p:cNvPr id="2" name="Title 1"/>
+          <p:cNvSpPr>
+            <a:spLocks noGrp="1"/>
+          </p:cNvSpPr>
+          <p:nvPr>
+            <p:ph type="title"/>
+          </p:nvPr>
+        </p:nvSpPr>
+        <p:spPr/>
+        <p:txBody>
+          <a:bodyPr/>
+          <a:lstStyle/>
+          <a:p>
+            <a:r>
+              <a:rPr lang="en-US" dirty="0" smtClean="0"/>
+              <a:t>Demo 2</a:t>
+            </a:r>
+            <a:endParaRPr lang="en-US" dirty="0"/>
+          </a:p>
+        </p:txBody>
+      </p:sp>
+      <p:sp>
+        <p:nvSpPr>
+          <p:cNvPr id="3" name="Content Placeholder 2"/>
+          <p:cNvSpPr>
+            <a:spLocks noGrp="1"/>
+          </p:cNvSpPr>
+          <p:nvPr>
+            <p:ph idx="1"/>
+          </p:nvPr>
+        </p:nvSpPr>
+        <p:spPr/>
+        <p:txBody>
+          <a:bodyPr/>
+          <a:lstStyle/>
+          <a:p>
+            <a:r>
+              <a:rPr lang="en-US" dirty="0" smtClean="0">
+                <a:hlinkClick r:id="rId2"/>
+              </a:rPr>
+              <a:t>https://microfrontends.com/</a:t>
+            </a:r>
+          </a:p>
+          <a:p>
+            <a:r>
+              <a:rPr lang="en-US" dirty="0" smtClean="0">
+                <a:hlinkClick r:id="rId2"/>
+              </a:rPr>
+              <a:t>https</a:t>
+            </a:r>
+            <a:r>
+              <a:rPr lang="en-US" dirty="0" smtClean="0">
+                <a:hlinkClick r:id="rId2"/>
+              </a:rPr>
+              <a:t>://</a:t>
+            </a:r>
+            <a:r>
+              <a:rPr lang="en-US" dirty="0" smtClean="0">
+                <a:hlinkClick r:id="rId2"/>
+              </a:rPr>
+              <a:t>github.com/orgs/micro-frontends-demo/repositories</a:t>
+            </a:r>
+            <a:endParaRPr lang="en-US" dirty="0" smtClean="0"/>
+          </a:p>
+          <a:p>
+            <a:endParaRPr lang="en-US" dirty="0"/>
+          </a:p>
+        </p:txBody>
+      </p:sp>
+    </p:spTree>
+  </p:cSld>
+  <p:clrMapOvr>
+    <a:masterClrMapping/>
+  </p:clrMapOvr>
+</p:sld>
+</file>
+
+<file path=ppt/slides/slide37.xml><?xml version="1.0" encoding="utf-8"?>
+<p:sld xmlns:a="http://schemas.openxmlformats.org/drawingml/2006/main" xmlns:r="http://schemas.openxmlformats.org/officeDocument/2006/relationships" xmlns:p="http://schemas.openxmlformats.org/presentationml/2006/main">
+  <p:cSld>
+    <p:spTree>
+      <p:nvGrpSpPr>
+        <p:cNvPr id="1" name=""/>
+        <p:cNvGrpSpPr/>
+        <p:nvPr/>
+      </p:nvGrpSpPr>
+      <p:grpSpPr>
+        <a:xfrm>
+          <a:off x="0" y="0"/>
+          <a:ext cx="0" cy="0"/>
+          <a:chOff x="0" y="0"/>
+          <a:chExt cx="0" cy="0"/>
+        </a:xfrm>
+      </p:grpSpPr>
+      <p:pic>
+        <p:nvPicPr>
+          <p:cNvPr id="2" name="Picture 2" descr="https://lh3.ggpht.com/1IfZLL2QDSjZ0wS7sUhaMlsAOS8BBzdR3wZ1WawgRn7KZAM8nEVZYMOUM-lqQb0ikIzp=w300"/>
+          <p:cNvPicPr>
+            <a:picLocks noChangeAspect="1" noChangeArrowheads="1"/>
+          </p:cNvPicPr>
+          <p:nvPr/>
+        </p:nvPicPr>
+        <p:blipFill>
+          <a:blip r:embed="rId2" cstate="print"/>
+          <a:srcRect/>
+          <a:stretch>
+            <a:fillRect/>
+          </a:stretch>
+        </p:blipFill>
+        <p:spPr bwMode="auto">
+          <a:xfrm>
+            <a:off x="3276600" y="1905000"/>
+            <a:ext cx="2857500" cy="2857500"/>
+          </a:xfrm>
+          <a:prstGeom prst="rect">
+            <a:avLst/>
+          </a:prstGeom>
+          <a:noFill/>
+        </p:spPr>
+      </p:pic>
+    </p:spTree>
+  </p:cSld>
+  <p:clrMapOvr>
+    <a:masterClrMapping/>
+  </p:clrMapOvr>
+</p:sld>
+</file>
+
+<file path=ppt/slides/slide38.xml><?xml version="1.0" encoding="utf-8"?>
+<p:sld xmlns:a="http://schemas.openxmlformats.org/drawingml/2006/main" xmlns:r="http://schemas.openxmlformats.org/officeDocument/2006/relationships" xmlns:p="http://schemas.openxmlformats.org/presentationml/2006/main">
+  <p:cSld>
+    <p:spTree>
+      <p:nvGrpSpPr>
+        <p:cNvPr id="1" name=""/>
+        <p:cNvGrpSpPr/>
+        <p:nvPr/>
+      </p:nvGrpSpPr>
+      <p:grpSpPr>
+        <a:xfrm>
+          <a:off x="0" y="0"/>
+          <a:ext cx="0" cy="0"/>
+          <a:chOff x="0" y="0"/>
+          <a:chExt cx="0" cy="0"/>
+        </a:xfrm>
+      </p:grpSpPr>
+      <p:sp>
+        <p:nvSpPr>
+          <p:cNvPr id="2" name="Title 1"/>
+          <p:cNvSpPr>
+            <a:spLocks noGrp="1"/>
+          </p:cNvSpPr>
+          <p:nvPr>
+            <p:ph type="title"/>
+          </p:nvPr>
+        </p:nvSpPr>
+        <p:spPr/>
+        <p:txBody>
+          <a:bodyPr/>
+          <a:lstStyle/>
+          <a:p>
+            <a:r>
+              <a:rPr lang="en-US" dirty="0" smtClean="0"/>
               <a:t>Further Reading</a:t>
             </a:r>
             <a:endParaRPr lang="en-US" dirty="0"/>
@@ -6848,7 +7074,7 @@
 </p:sld>
 </file>
 
-<file path=ppt/slides/slide36.xml><?xml version="1.0" encoding="utf-8"?>
+<file path=ppt/slides/slide39.xml><?xml version="1.0" encoding="utf-8"?>
 <p:sld xmlns:a="http://schemas.openxmlformats.org/drawingml/2006/main" xmlns:r="http://schemas.openxmlformats.org/officeDocument/2006/relationships" xmlns:p="http://schemas.openxmlformats.org/presentationml/2006/main">
   <p:cSld>
     <p:spTree>
